--- a/01 Classes/Aula 07 - Aplicação Cloud Indústria 40 Python IoT Plataforma Outras Soluções.pptx
+++ b/01 Classes/Aula 07 - Aplicação Cloud Indústria 40 Python IoT Plataforma Outras Soluções.pptx
@@ -9812,7 +9812,7 @@
                 <a:latin typeface="Times New Roman" panose="02020603050405020304" pitchFamily="18" charset="0"/>
                 <a:cs typeface="Times New Roman" panose="02020603050405020304" pitchFamily="18" charset="0"/>
               </a:rPr>
-              <a:t>['logradouro’]); </a:t>
+              <a:t>['logradouro']); </a:t>
             </a:r>
             <a:r>
               <a:rPr lang="pt-BR" sz="1600" b="1" dirty="0">
@@ -9840,7 +9840,7 @@
                 <a:latin typeface="Times New Roman" panose="02020603050405020304" pitchFamily="18" charset="0"/>
                 <a:cs typeface="Times New Roman" panose="02020603050405020304" pitchFamily="18" charset="0"/>
               </a:rPr>
-              <a:t>['bairro’]); </a:t>
+              <a:t>['bairro']); </a:t>
             </a:r>
             <a:r>
               <a:rPr lang="pt-BR" sz="1600" b="1" dirty="0">
@@ -9868,7 +9868,7 @@
                 <a:latin typeface="Times New Roman" panose="02020603050405020304" pitchFamily="18" charset="0"/>
                 <a:cs typeface="Times New Roman" panose="02020603050405020304" pitchFamily="18" charset="0"/>
               </a:rPr>
-              <a:t>['cidade’])</a:t>
+              <a:t>['cidade'])</a:t>
             </a:r>
           </a:p>
           <a:p>
@@ -9908,7 +9908,7 @@
                 <a:latin typeface="Times New Roman" panose="02020603050405020304" pitchFamily="18" charset="0"/>
                 <a:cs typeface="Times New Roman" panose="02020603050405020304" pitchFamily="18" charset="0"/>
               </a:rPr>
-              <a:t>['complemento’]); </a:t>
+              <a:t>['complemento']); </a:t>
             </a:r>
             <a:r>
               <a:rPr lang="pt-BR" sz="1600" b="1" dirty="0">
@@ -9936,7 +9936,7 @@
                 <a:latin typeface="Times New Roman" panose="02020603050405020304" pitchFamily="18" charset="0"/>
                 <a:cs typeface="Times New Roman" panose="02020603050405020304" pitchFamily="18" charset="0"/>
               </a:rPr>
-              <a:t>['uf’]); </a:t>
+              <a:t>['uf']); </a:t>
             </a:r>
             <a:r>
               <a:rPr lang="pt-BR" sz="1600" b="1" dirty="0">

--- a/01 Classes/Aula 07 - Aplicação Cloud Indústria 40 Python IoT Plataforma Outras Soluções.pptx
+++ b/01 Classes/Aula 07 - Aplicação Cloud Indústria 40 Python IoT Plataforma Outras Soluções.pptx
@@ -5200,7 +5200,21 @@
                 <a:latin typeface="Times New Roman" panose="02020603050405020304" pitchFamily="18" charset="0"/>
                 <a:cs typeface="Times New Roman" panose="02020603050405020304" pitchFamily="18" charset="0"/>
               </a:rPr>
-              <a:t> → Esta é a primeira grande biblioteca de inteligência artificial, dependendo da área de inteligência artificial que você queira atuar vão existir outras bibliotecas como: </a:t>
+              <a:t> → Esta é a primeira grande biblioteca de inteligência artificial, dependendo da área de </a:t>
+            </a:r>
+            <a:r>
+              <a:rPr lang="pt-BR" sz="2000" b="1" dirty="0">
+                <a:latin typeface="Times New Roman" panose="02020603050405020304" pitchFamily="18" charset="0"/>
+                <a:cs typeface="Times New Roman" panose="02020603050405020304" pitchFamily="18" charset="0"/>
+              </a:rPr>
+              <a:t>inteligência artificial </a:t>
+            </a:r>
+            <a:r>
+              <a:rPr lang="pt-BR" sz="2000" dirty="0">
+                <a:latin typeface="Times New Roman" panose="02020603050405020304" pitchFamily="18" charset="0"/>
+                <a:cs typeface="Times New Roman" panose="02020603050405020304" pitchFamily="18" charset="0"/>
+              </a:rPr>
+              <a:t>que você queira atuar vão existir outras bibliotecas como: </a:t>
             </a:r>
             <a:r>
               <a:rPr lang="pt-BR" sz="2000" dirty="0">
@@ -5671,7 +5685,7 @@
                 <a:latin typeface="Times New Roman" panose="02020603050405020304" pitchFamily="18" charset="0"/>
                 <a:cs typeface="Times New Roman" panose="02020603050405020304" pitchFamily="18" charset="0"/>
               </a:rPr>
-              <a:t>No Python a mesma aplicação que faz o APP faz também o programa. Criar um único programa que consegue rodar no computador, no IOS, no androide, etc.</a:t>
+              <a:t>	No Python a mesma aplicação que faz o APP faz também o programa. Criar um único programa que consegue rodar no computador, no IOS, no androide, etc.</a:t>
             </a:r>
           </a:p>
           <a:p>
@@ -5933,14 +5947,81 @@
                 <a:latin typeface="Times New Roman" panose="02020603050405020304" pitchFamily="18" charset="0"/>
                 <a:cs typeface="Times New Roman" panose="02020603050405020304" pitchFamily="18" charset="0"/>
               </a:rPr>
-              <a:t># extensão </a:t>
+              <a:t># </a:t>
+            </a:r>
+            <a:r>
+              <a:rPr lang="pt-BR" sz="2000" b="1" dirty="0">
+                <a:solidFill>
+                  <a:srgbClr val="FF0000"/>
+                </a:solidFill>
+                <a:latin typeface="Times New Roman" panose="02020603050405020304" pitchFamily="18" charset="0"/>
+                <a:cs typeface="Times New Roman" panose="02020603050405020304" pitchFamily="18" charset="0"/>
+              </a:rPr>
+              <a:t>extensão </a:t>
+            </a:r>
+            <a:r>
+              <a:rPr lang="pt-BR" sz="2000" b="1" dirty="0" err="1">
+                <a:solidFill>
+                  <a:srgbClr val="FF0000"/>
+                </a:solidFill>
+                <a:latin typeface="Times New Roman" panose="02020603050405020304" pitchFamily="18" charset="0"/>
+                <a:cs typeface="Times New Roman" panose="02020603050405020304" pitchFamily="18" charset="0"/>
+              </a:rPr>
+              <a:t>jupyter</a:t>
+            </a:r>
+            <a:endParaRPr lang="pt-BR" sz="2000" b="1" dirty="0">
+              <a:solidFill>
+                <a:srgbClr val="FF0000"/>
+              </a:solidFill>
+              <a:latin typeface="Times New Roman" panose="02020603050405020304" pitchFamily="18" charset="0"/>
+              <a:cs typeface="Times New Roman" panose="02020603050405020304" pitchFamily="18" charset="0"/>
+            </a:endParaRPr>
+          </a:p>
+          <a:p>
+            <a:pPr marL="0" indent="0" algn="just">
+              <a:buNone/>
+            </a:pPr>
+            <a:r>
+              <a:rPr lang="pt-BR" sz="2000" dirty="0">
+                <a:latin typeface="Times New Roman" panose="02020603050405020304" pitchFamily="18" charset="0"/>
+                <a:cs typeface="Times New Roman" panose="02020603050405020304" pitchFamily="18" charset="0"/>
+              </a:rPr>
+              <a:t># </a:t>
             </a:r>
             <a:r>
               <a:rPr lang="pt-BR" sz="2000" dirty="0" err="1">
                 <a:latin typeface="Times New Roman" panose="02020603050405020304" pitchFamily="18" charset="0"/>
                 <a:cs typeface="Times New Roman" panose="02020603050405020304" pitchFamily="18" charset="0"/>
               </a:rPr>
-              <a:t>jupyter</a:t>
+              <a:t>pip</a:t>
+            </a:r>
+            <a:r>
+              <a:rPr lang="pt-BR" sz="2000" dirty="0">
+                <a:latin typeface="Times New Roman" panose="02020603050405020304" pitchFamily="18" charset="0"/>
+                <a:cs typeface="Times New Roman" panose="02020603050405020304" pitchFamily="18" charset="0"/>
+              </a:rPr>
+              <a:t> </a:t>
+            </a:r>
+            <a:r>
+              <a:rPr lang="pt-BR" sz="2000" b="1" dirty="0" err="1">
+                <a:latin typeface="Times New Roman" panose="02020603050405020304" pitchFamily="18" charset="0"/>
+                <a:cs typeface="Times New Roman" panose="02020603050405020304" pitchFamily="18" charset="0"/>
+              </a:rPr>
+              <a:t>install</a:t>
+            </a:r>
+            <a:r>
+              <a:rPr lang="pt-BR" sz="2000" dirty="0">
+                <a:latin typeface="Times New Roman" panose="02020603050405020304" pitchFamily="18" charset="0"/>
+                <a:cs typeface="Times New Roman" panose="02020603050405020304" pitchFamily="18" charset="0"/>
+              </a:rPr>
+              <a:t> </a:t>
+            </a:r>
+            <a:r>
+              <a:rPr lang="pt-BR" sz="2000" dirty="0" err="1">
+                <a:latin typeface="Times New Roman" panose="02020603050405020304" pitchFamily="18" charset="0"/>
+                <a:cs typeface="Times New Roman" panose="02020603050405020304" pitchFamily="18" charset="0"/>
+              </a:rPr>
+              <a:t>ipykernell</a:t>
             </a:r>
             <a:endParaRPr lang="pt-BR" sz="2000" dirty="0">
               <a:latin typeface="Times New Roman" panose="02020603050405020304" pitchFamily="18" charset="0"/>
@@ -5951,48 +6032,6 @@
             <a:pPr marL="0" indent="0" algn="just">
               <a:buNone/>
             </a:pPr>
-            <a:r>
-              <a:rPr lang="pt-BR" sz="2000" dirty="0">
-                <a:latin typeface="Times New Roman" panose="02020603050405020304" pitchFamily="18" charset="0"/>
-                <a:cs typeface="Times New Roman" panose="02020603050405020304" pitchFamily="18" charset="0"/>
-              </a:rPr>
-              <a:t># </a:t>
-            </a:r>
-            <a:r>
-              <a:rPr lang="pt-BR" sz="2000" dirty="0" err="1">
-                <a:latin typeface="Times New Roman" panose="02020603050405020304" pitchFamily="18" charset="0"/>
-                <a:cs typeface="Times New Roman" panose="02020603050405020304" pitchFamily="18" charset="0"/>
-              </a:rPr>
-              <a:t>pip</a:t>
-            </a:r>
-            <a:r>
-              <a:rPr lang="pt-BR" sz="2000" dirty="0">
-                <a:latin typeface="Times New Roman" panose="02020603050405020304" pitchFamily="18" charset="0"/>
-                <a:cs typeface="Times New Roman" panose="02020603050405020304" pitchFamily="18" charset="0"/>
-              </a:rPr>
-              <a:t> </a:t>
-            </a:r>
-            <a:r>
-              <a:rPr lang="pt-BR" sz="2000" dirty="0" err="1">
-                <a:latin typeface="Times New Roman" panose="02020603050405020304" pitchFamily="18" charset="0"/>
-                <a:cs typeface="Times New Roman" panose="02020603050405020304" pitchFamily="18" charset="0"/>
-              </a:rPr>
-              <a:t>install</a:t>
-            </a:r>
-            <a:r>
-              <a:rPr lang="pt-BR" sz="2000" dirty="0">
-                <a:latin typeface="Times New Roman" panose="02020603050405020304" pitchFamily="18" charset="0"/>
-                <a:cs typeface="Times New Roman" panose="02020603050405020304" pitchFamily="18" charset="0"/>
-              </a:rPr>
-              <a:t> </a:t>
-            </a:r>
-            <a:r>
-              <a:rPr lang="pt-BR" sz="2000" dirty="0" err="1">
-                <a:latin typeface="Times New Roman" panose="02020603050405020304" pitchFamily="18" charset="0"/>
-                <a:cs typeface="Times New Roman" panose="02020603050405020304" pitchFamily="18" charset="0"/>
-              </a:rPr>
-              <a:t>ipykernell</a:t>
-            </a:r>
             <a:endParaRPr lang="pt-BR" sz="2000" dirty="0">
               <a:latin typeface="Times New Roman" panose="02020603050405020304" pitchFamily="18" charset="0"/>
               <a:cs typeface="Times New Roman" panose="02020603050405020304" pitchFamily="18" charset="0"/>
@@ -6002,6 +6041,110 @@
             <a:pPr marL="0" indent="0" algn="just">
               <a:buNone/>
             </a:pPr>
+            <a:r>
+              <a:rPr lang="pt-BR" sz="2000" dirty="0">
+                <a:latin typeface="Times New Roman" panose="02020603050405020304" pitchFamily="18" charset="0"/>
+                <a:cs typeface="Times New Roman" panose="02020603050405020304" pitchFamily="18" charset="0"/>
+              </a:rPr>
+              <a:t># </a:t>
+            </a:r>
+            <a:r>
+              <a:rPr lang="pt-BR" sz="2000" b="1" dirty="0" err="1">
+                <a:solidFill>
+                  <a:srgbClr val="FF0000"/>
+                </a:solidFill>
+                <a:latin typeface="Times New Roman" panose="02020603050405020304" pitchFamily="18" charset="0"/>
+                <a:cs typeface="Times New Roman" panose="02020603050405020304" pitchFamily="18" charset="0"/>
+              </a:rPr>
+              <a:t>pip</a:t>
+            </a:r>
+            <a:r>
+              <a:rPr lang="pt-BR" sz="2000" b="1" dirty="0">
+                <a:solidFill>
+                  <a:srgbClr val="FF0000"/>
+                </a:solidFill>
+                <a:latin typeface="Times New Roman" panose="02020603050405020304" pitchFamily="18" charset="0"/>
+                <a:cs typeface="Times New Roman" panose="02020603050405020304" pitchFamily="18" charset="0"/>
+              </a:rPr>
+              <a:t> </a:t>
+            </a:r>
+            <a:r>
+              <a:rPr lang="pt-BR" sz="2000" b="1" dirty="0" err="1">
+                <a:solidFill>
+                  <a:srgbClr val="FF0000"/>
+                </a:solidFill>
+                <a:latin typeface="Times New Roman" panose="02020603050405020304" pitchFamily="18" charset="0"/>
+                <a:cs typeface="Times New Roman" panose="02020603050405020304" pitchFamily="18" charset="0"/>
+              </a:rPr>
+              <a:t>install</a:t>
+            </a:r>
+            <a:r>
+              <a:rPr lang="pt-BR" sz="2000" b="1" dirty="0">
+                <a:solidFill>
+                  <a:srgbClr val="FF0000"/>
+                </a:solidFill>
+                <a:latin typeface="Times New Roman" panose="02020603050405020304" pitchFamily="18" charset="0"/>
+                <a:cs typeface="Times New Roman" panose="02020603050405020304" pitchFamily="18" charset="0"/>
+              </a:rPr>
+              <a:t> </a:t>
+            </a:r>
+            <a:r>
+              <a:rPr lang="pt-BR" sz="2000" b="1" dirty="0" err="1">
+                <a:solidFill>
+                  <a:srgbClr val="FF0000"/>
+                </a:solidFill>
+                <a:latin typeface="Times New Roman" panose="02020603050405020304" pitchFamily="18" charset="0"/>
+                <a:cs typeface="Times New Roman" panose="02020603050405020304" pitchFamily="18" charset="0"/>
+              </a:rPr>
+              <a:t>numpy</a:t>
+            </a:r>
+            <a:endParaRPr lang="pt-BR" sz="2000" b="1" dirty="0">
+              <a:solidFill>
+                <a:srgbClr val="FF0000"/>
+              </a:solidFill>
+              <a:latin typeface="Times New Roman" panose="02020603050405020304" pitchFamily="18" charset="0"/>
+              <a:cs typeface="Times New Roman" panose="02020603050405020304" pitchFamily="18" charset="0"/>
+            </a:endParaRPr>
+          </a:p>
+          <a:p>
+            <a:pPr marL="0" indent="0" algn="just">
+              <a:buNone/>
+            </a:pPr>
+            <a:r>
+              <a:rPr lang="pt-BR" sz="2000" dirty="0" err="1">
+                <a:latin typeface="Times New Roman" panose="02020603050405020304" pitchFamily="18" charset="0"/>
+                <a:cs typeface="Times New Roman" panose="02020603050405020304" pitchFamily="18" charset="0"/>
+              </a:rPr>
+              <a:t>import</a:t>
+            </a:r>
+            <a:r>
+              <a:rPr lang="pt-BR" sz="2000" dirty="0">
+                <a:latin typeface="Times New Roman" panose="02020603050405020304" pitchFamily="18" charset="0"/>
+                <a:cs typeface="Times New Roman" panose="02020603050405020304" pitchFamily="18" charset="0"/>
+              </a:rPr>
+              <a:t> </a:t>
+            </a:r>
+            <a:r>
+              <a:rPr lang="pt-BR" sz="2000" dirty="0" err="1">
+                <a:latin typeface="Times New Roman" panose="02020603050405020304" pitchFamily="18" charset="0"/>
+                <a:cs typeface="Times New Roman" panose="02020603050405020304" pitchFamily="18" charset="0"/>
+              </a:rPr>
+              <a:t>numpy</a:t>
+            </a:r>
+            <a:r>
+              <a:rPr lang="pt-BR" sz="2000" dirty="0">
+                <a:latin typeface="Times New Roman" panose="02020603050405020304" pitchFamily="18" charset="0"/>
+                <a:cs typeface="Times New Roman" panose="02020603050405020304" pitchFamily="18" charset="0"/>
+              </a:rPr>
+              <a:t> as </a:t>
+            </a:r>
+            <a:r>
+              <a:rPr lang="pt-BR" sz="2000" dirty="0" err="1">
+                <a:latin typeface="Times New Roman" panose="02020603050405020304" pitchFamily="18" charset="0"/>
+                <a:cs typeface="Times New Roman" panose="02020603050405020304" pitchFamily="18" charset="0"/>
+              </a:rPr>
+              <a:t>np</a:t>
+            </a:r>
             <a:endParaRPr lang="pt-BR" sz="2000" dirty="0">
               <a:latin typeface="Times New Roman" panose="02020603050405020304" pitchFamily="18" charset="0"/>
               <a:cs typeface="Times New Roman" panose="02020603050405020304" pitchFamily="18" charset="0"/>
@@ -6011,48 +6154,6 @@
             <a:pPr marL="0" indent="0" algn="just">
               <a:buNone/>
             </a:pPr>
-            <a:r>
-              <a:rPr lang="pt-BR" sz="2000" dirty="0">
-                <a:latin typeface="Times New Roman" panose="02020603050405020304" pitchFamily="18" charset="0"/>
-                <a:cs typeface="Times New Roman" panose="02020603050405020304" pitchFamily="18" charset="0"/>
-              </a:rPr>
-              <a:t># </a:t>
-            </a:r>
-            <a:r>
-              <a:rPr lang="pt-BR" sz="2000" dirty="0" err="1">
-                <a:latin typeface="Times New Roman" panose="02020603050405020304" pitchFamily="18" charset="0"/>
-                <a:cs typeface="Times New Roman" panose="02020603050405020304" pitchFamily="18" charset="0"/>
-              </a:rPr>
-              <a:t>pip</a:t>
-            </a:r>
-            <a:r>
-              <a:rPr lang="pt-BR" sz="2000" dirty="0">
-                <a:latin typeface="Times New Roman" panose="02020603050405020304" pitchFamily="18" charset="0"/>
-                <a:cs typeface="Times New Roman" panose="02020603050405020304" pitchFamily="18" charset="0"/>
-              </a:rPr>
-              <a:t> </a:t>
-            </a:r>
-            <a:r>
-              <a:rPr lang="pt-BR" sz="2000" dirty="0" err="1">
-                <a:latin typeface="Times New Roman" panose="02020603050405020304" pitchFamily="18" charset="0"/>
-                <a:cs typeface="Times New Roman" panose="02020603050405020304" pitchFamily="18" charset="0"/>
-              </a:rPr>
-              <a:t>install</a:t>
-            </a:r>
-            <a:r>
-              <a:rPr lang="pt-BR" sz="2000" dirty="0">
-                <a:latin typeface="Times New Roman" panose="02020603050405020304" pitchFamily="18" charset="0"/>
-                <a:cs typeface="Times New Roman" panose="02020603050405020304" pitchFamily="18" charset="0"/>
-              </a:rPr>
-              <a:t> </a:t>
-            </a:r>
-            <a:r>
-              <a:rPr lang="pt-BR" sz="2000" dirty="0" err="1">
-                <a:latin typeface="Times New Roman" panose="02020603050405020304" pitchFamily="18" charset="0"/>
-                <a:cs typeface="Times New Roman" panose="02020603050405020304" pitchFamily="18" charset="0"/>
-              </a:rPr>
-              <a:t>numpy</a:t>
-            </a:r>
             <a:endParaRPr lang="pt-BR" sz="2000" dirty="0">
               <a:latin typeface="Times New Roman" panose="02020603050405020304" pitchFamily="18" charset="0"/>
               <a:cs typeface="Times New Roman" panose="02020603050405020304" pitchFamily="18" charset="0"/>
@@ -6063,88 +6164,47 @@
               <a:buNone/>
             </a:pPr>
             <a:r>
-              <a:rPr lang="pt-BR" sz="2000" dirty="0" err="1">
-                <a:latin typeface="Times New Roman" panose="02020603050405020304" pitchFamily="18" charset="0"/>
-                <a:cs typeface="Times New Roman" panose="02020603050405020304" pitchFamily="18" charset="0"/>
-              </a:rPr>
-              <a:t>import</a:t>
-            </a:r>
-            <a:r>
-              <a:rPr lang="pt-BR" sz="2000" dirty="0">
+              <a:rPr lang="pt-BR" sz="2000" dirty="0">
+                <a:latin typeface="Times New Roman" panose="02020603050405020304" pitchFamily="18" charset="0"/>
+                <a:cs typeface="Times New Roman" panose="02020603050405020304" pitchFamily="18" charset="0"/>
+              </a:rPr>
+              <a:t># </a:t>
+            </a:r>
+            <a:r>
+              <a:rPr lang="pt-BR" sz="2000" b="1" dirty="0" err="1">
+                <a:solidFill>
+                  <a:srgbClr val="FF0000"/>
+                </a:solidFill>
+                <a:latin typeface="Times New Roman" panose="02020603050405020304" pitchFamily="18" charset="0"/>
+                <a:cs typeface="Times New Roman" panose="02020603050405020304" pitchFamily="18" charset="0"/>
+              </a:rPr>
+              <a:t>pip</a:t>
+            </a:r>
+            <a:r>
+              <a:rPr lang="pt-BR" sz="2000" b="1" dirty="0">
+                <a:solidFill>
+                  <a:srgbClr val="FF0000"/>
+                </a:solidFill>
                 <a:latin typeface="Times New Roman" panose="02020603050405020304" pitchFamily="18" charset="0"/>
                 <a:cs typeface="Times New Roman" panose="02020603050405020304" pitchFamily="18" charset="0"/>
               </a:rPr>
               <a:t> </a:t>
             </a:r>
             <a:r>
-              <a:rPr lang="pt-BR" sz="2000" dirty="0" err="1">
-                <a:latin typeface="Times New Roman" panose="02020603050405020304" pitchFamily="18" charset="0"/>
-                <a:cs typeface="Times New Roman" panose="02020603050405020304" pitchFamily="18" charset="0"/>
-              </a:rPr>
-              <a:t>numpy</a:t>
-            </a:r>
-            <a:r>
-              <a:rPr lang="pt-BR" sz="2000" dirty="0">
-                <a:latin typeface="Times New Roman" panose="02020603050405020304" pitchFamily="18" charset="0"/>
-                <a:cs typeface="Times New Roman" panose="02020603050405020304" pitchFamily="18" charset="0"/>
-              </a:rPr>
-              <a:t> as </a:t>
-            </a:r>
-            <a:r>
-              <a:rPr lang="pt-BR" sz="2000" dirty="0" err="1">
-                <a:latin typeface="Times New Roman" panose="02020603050405020304" pitchFamily="18" charset="0"/>
-                <a:cs typeface="Times New Roman" panose="02020603050405020304" pitchFamily="18" charset="0"/>
-              </a:rPr>
-              <a:t>np</a:t>
-            </a:r>
-            <a:endParaRPr lang="pt-BR" sz="2000" dirty="0">
-              <a:latin typeface="Times New Roman" panose="02020603050405020304" pitchFamily="18" charset="0"/>
-              <a:cs typeface="Times New Roman" panose="02020603050405020304" pitchFamily="18" charset="0"/>
-            </a:endParaRPr>
-          </a:p>
-          <a:p>
-            <a:pPr marL="0" indent="0" algn="just">
-              <a:buNone/>
-            </a:pPr>
-            <a:endParaRPr lang="pt-BR" sz="2000" dirty="0">
-              <a:latin typeface="Times New Roman" panose="02020603050405020304" pitchFamily="18" charset="0"/>
-              <a:cs typeface="Times New Roman" panose="02020603050405020304" pitchFamily="18" charset="0"/>
-            </a:endParaRPr>
-          </a:p>
-          <a:p>
-            <a:pPr marL="0" indent="0" algn="just">
-              <a:buNone/>
-            </a:pPr>
-            <a:r>
-              <a:rPr lang="pt-BR" sz="2000" dirty="0">
-                <a:latin typeface="Times New Roman" panose="02020603050405020304" pitchFamily="18" charset="0"/>
-                <a:cs typeface="Times New Roman" panose="02020603050405020304" pitchFamily="18" charset="0"/>
-              </a:rPr>
-              <a:t># </a:t>
-            </a:r>
-            <a:r>
-              <a:rPr lang="pt-BR" sz="2000" dirty="0" err="1">
-                <a:latin typeface="Times New Roman" panose="02020603050405020304" pitchFamily="18" charset="0"/>
-                <a:cs typeface="Times New Roman" panose="02020603050405020304" pitchFamily="18" charset="0"/>
-              </a:rPr>
-              <a:t>pip</a:t>
-            </a:r>
-            <a:r>
-              <a:rPr lang="pt-BR" sz="2000" dirty="0">
-                <a:latin typeface="Times New Roman" panose="02020603050405020304" pitchFamily="18" charset="0"/>
-                <a:cs typeface="Times New Roman" panose="02020603050405020304" pitchFamily="18" charset="0"/>
-              </a:rPr>
-              <a:t> </a:t>
-            </a:r>
-            <a:r>
-              <a:rPr lang="pt-BR" sz="2000" dirty="0" err="1">
+              <a:rPr lang="pt-BR" sz="2000" b="1" dirty="0" err="1">
+                <a:solidFill>
+                  <a:srgbClr val="FF0000"/>
+                </a:solidFill>
                 <a:latin typeface="Times New Roman" panose="02020603050405020304" pitchFamily="18" charset="0"/>
                 <a:cs typeface="Times New Roman" panose="02020603050405020304" pitchFamily="18" charset="0"/>
               </a:rPr>
               <a:t>install</a:t>
             </a:r>
             <a:r>
-              <a:rPr lang="pt-BR" sz="2000" dirty="0">
+              <a:rPr lang="pt-BR" sz="2000" b="1" dirty="0">
+                <a:solidFill>
+                  <a:srgbClr val="FF0000"/>
+                </a:solidFill>
                 <a:latin typeface="Times New Roman" panose="02020603050405020304" pitchFamily="18" charset="0"/>
                 <a:cs typeface="Times New Roman" panose="02020603050405020304" pitchFamily="18" charset="0"/>
               </a:rPr>
@@ -6299,7 +6359,7 @@
               <a:t> </a:t>
             </a:r>
             <a:r>
-              <a:rPr lang="pt-BR" sz="2000" dirty="0" err="1">
+              <a:rPr lang="pt-BR" sz="2000" b="1" dirty="0" err="1">
                 <a:latin typeface="Times New Roman" panose="02020603050405020304" pitchFamily="18" charset="0"/>
                 <a:cs typeface="Times New Roman" panose="02020603050405020304" pitchFamily="18" charset="0"/>
               </a:rPr>
@@ -6329,7 +6389,10 @@
               <a:buNone/>
             </a:pPr>
             <a:r>
-              <a:rPr lang="pt-BR" sz="2000" dirty="0" err="1">
+              <a:rPr lang="pt-BR" sz="2000" b="1" dirty="0" err="1">
+                <a:solidFill>
+                  <a:srgbClr val="FF0000"/>
+                </a:solidFill>
                 <a:latin typeface="Times New Roman" panose="02020603050405020304" pitchFamily="18" charset="0"/>
                 <a:cs typeface="Times New Roman" panose="02020603050405020304" pitchFamily="18" charset="0"/>
               </a:rPr>
@@ -6392,7 +6455,7 @@
               <a:t> </a:t>
             </a:r>
             <a:r>
-              <a:rPr lang="pt-BR" sz="2000" dirty="0" err="1">
+              <a:rPr lang="pt-BR" sz="2000" b="1" dirty="0" err="1">
                 <a:latin typeface="Times New Roman" panose="02020603050405020304" pitchFamily="18" charset="0"/>
                 <a:cs typeface="Times New Roman" panose="02020603050405020304" pitchFamily="18" charset="0"/>
               </a:rPr>
@@ -6422,7 +6485,10 @@
               <a:buNone/>
             </a:pPr>
             <a:r>
-              <a:rPr lang="pt-BR" sz="2000" dirty="0" err="1">
+              <a:rPr lang="pt-BR" sz="2000" b="1" dirty="0" err="1">
+                <a:solidFill>
+                  <a:srgbClr val="FF0000"/>
+                </a:solidFill>
                 <a:latin typeface="Times New Roman" panose="02020603050405020304" pitchFamily="18" charset="0"/>
                 <a:cs typeface="Times New Roman" panose="02020603050405020304" pitchFamily="18" charset="0"/>
               </a:rPr>
@@ -6496,7 +6562,7 @@
               <a:t> </a:t>
             </a:r>
             <a:r>
-              <a:rPr lang="pt-BR" sz="2000" dirty="0" err="1">
+              <a:rPr lang="pt-BR" sz="2000" b="1" dirty="0" err="1">
                 <a:latin typeface="Times New Roman" panose="02020603050405020304" pitchFamily="18" charset="0"/>
                 <a:cs typeface="Times New Roman" panose="02020603050405020304" pitchFamily="18" charset="0"/>
               </a:rPr>
@@ -6526,7 +6592,10 @@
               <a:buNone/>
             </a:pPr>
             <a:r>
-              <a:rPr lang="pt-BR" sz="2000" dirty="0" err="1">
+              <a:rPr lang="pt-BR" sz="2000" b="1" dirty="0" err="1">
+                <a:solidFill>
+                  <a:srgbClr val="FF0000"/>
+                </a:solidFill>
                 <a:latin typeface="Times New Roman" panose="02020603050405020304" pitchFamily="18" charset="0"/>
                 <a:cs typeface="Times New Roman" panose="02020603050405020304" pitchFamily="18" charset="0"/>
               </a:rPr>
@@ -6657,8 +6726,8 @@
         </p:nvSpPr>
         <p:spPr>
           <a:xfrm>
-            <a:off x="142865" y="1200150"/>
-            <a:ext cx="8865056" cy="3737370"/>
+            <a:off x="142865" y="1052233"/>
+            <a:ext cx="8865056" cy="4033204"/>
           </a:xfrm>
         </p:spPr>
         <p:txBody>
@@ -6671,25 +6740,124 @@
               <a:buNone/>
             </a:pPr>
             <a:r>
-              <a:rPr lang="pt-BR" sz="2000" dirty="0" err="1">
-                <a:latin typeface="Times New Roman" panose="02020603050405020304" pitchFamily="18" charset="0"/>
-                <a:cs typeface="Times New Roman" panose="02020603050405020304" pitchFamily="18" charset="0"/>
-              </a:rPr>
-              <a:t>yf.pdr_override</a:t>
-            </a:r>
-            <a:r>
-              <a:rPr lang="pt-BR" sz="2000" dirty="0">
-                <a:latin typeface="Times New Roman" panose="02020603050405020304" pitchFamily="18" charset="0"/>
-                <a:cs typeface="Times New Roman" panose="02020603050405020304" pitchFamily="18" charset="0"/>
-              </a:rPr>
-              <a:t>()</a:t>
-            </a:r>
-          </a:p>
-          <a:p>
-            <a:pPr marL="0" indent="0" algn="just">
-              <a:buNone/>
-            </a:pPr>
-            <a:endParaRPr lang="pt-BR" sz="2000" dirty="0">
+              <a:rPr lang="pt-BR" sz="1800" dirty="0">
+                <a:latin typeface="Times New Roman" panose="02020603050405020304" pitchFamily="18" charset="0"/>
+                <a:cs typeface="Times New Roman" panose="02020603050405020304" pitchFamily="18" charset="0"/>
+              </a:rPr>
+              <a:t># </a:t>
+            </a:r>
+            <a:r>
+              <a:rPr lang="pt-BR" sz="1800" b="1" dirty="0">
+                <a:solidFill>
+                  <a:srgbClr val="FF0000"/>
+                </a:solidFill>
+                <a:latin typeface="Times New Roman" panose="02020603050405020304" pitchFamily="18" charset="0"/>
+                <a:cs typeface="Times New Roman" panose="02020603050405020304" pitchFamily="18" charset="0"/>
+              </a:rPr>
+              <a:t>Bolsa Bovespa</a:t>
+            </a:r>
+          </a:p>
+          <a:p>
+            <a:pPr marL="0" indent="0" algn="just">
+              <a:buNone/>
+            </a:pPr>
+            <a:r>
+              <a:rPr lang="pt-BR" sz="1800" dirty="0" err="1">
+                <a:latin typeface="Times New Roman" panose="02020603050405020304" pitchFamily="18" charset="0"/>
+                <a:cs typeface="Times New Roman" panose="02020603050405020304" pitchFamily="18" charset="0"/>
+              </a:rPr>
+              <a:t>ibov</a:t>
+            </a:r>
+            <a:r>
+              <a:rPr lang="pt-BR" sz="1800" dirty="0">
+                <a:latin typeface="Times New Roman" panose="02020603050405020304" pitchFamily="18" charset="0"/>
+                <a:cs typeface="Times New Roman" panose="02020603050405020304" pitchFamily="18" charset="0"/>
+              </a:rPr>
+              <a:t> = </a:t>
+            </a:r>
+            <a:r>
+              <a:rPr lang="pt-BR" sz="1800" dirty="0" err="1">
+                <a:latin typeface="Times New Roman" panose="02020603050405020304" pitchFamily="18" charset="0"/>
+                <a:cs typeface="Times New Roman" panose="02020603050405020304" pitchFamily="18" charset="0"/>
+              </a:rPr>
+              <a:t>yf.download</a:t>
+            </a:r>
+            <a:r>
+              <a:rPr lang="pt-BR" sz="1800" dirty="0">
+                <a:latin typeface="Times New Roman" panose="02020603050405020304" pitchFamily="18" charset="0"/>
+                <a:cs typeface="Times New Roman" panose="02020603050405020304" pitchFamily="18" charset="0"/>
+              </a:rPr>
+              <a:t>('^BVSP', </a:t>
+            </a:r>
+            <a:r>
+              <a:rPr lang="pt-BR" sz="1800" dirty="0" err="1">
+                <a:latin typeface="Times New Roman" panose="02020603050405020304" pitchFamily="18" charset="0"/>
+                <a:cs typeface="Times New Roman" panose="02020603050405020304" pitchFamily="18" charset="0"/>
+              </a:rPr>
+              <a:t>period</a:t>
+            </a:r>
+            <a:r>
+              <a:rPr lang="pt-BR" sz="1800" dirty="0">
+                <a:latin typeface="Times New Roman" panose="02020603050405020304" pitchFamily="18" charset="0"/>
+                <a:cs typeface="Times New Roman" panose="02020603050405020304" pitchFamily="18" charset="0"/>
+              </a:rPr>
+              <a:t>='</a:t>
+            </a:r>
+            <a:r>
+              <a:rPr lang="pt-BR" sz="1800" dirty="0" err="1">
+                <a:latin typeface="Times New Roman" panose="02020603050405020304" pitchFamily="18" charset="0"/>
+                <a:cs typeface="Times New Roman" panose="02020603050405020304" pitchFamily="18" charset="0"/>
+              </a:rPr>
+              <a:t>max</a:t>
+            </a:r>
+            <a:r>
+              <a:rPr lang="pt-BR" sz="1800" dirty="0">
+                <a:latin typeface="Times New Roman" panose="02020603050405020304" pitchFamily="18" charset="0"/>
+                <a:cs typeface="Times New Roman" panose="02020603050405020304" pitchFamily="18" charset="0"/>
+              </a:rPr>
+              <a:t>') </a:t>
+            </a:r>
+          </a:p>
+          <a:p>
+            <a:pPr marL="0" indent="0" algn="just">
+              <a:buNone/>
+            </a:pPr>
+            <a:r>
+              <a:rPr lang="pt-BR" sz="1800" dirty="0">
+                <a:latin typeface="Times New Roman" panose="02020603050405020304" pitchFamily="18" charset="0"/>
+                <a:cs typeface="Times New Roman" panose="02020603050405020304" pitchFamily="18" charset="0"/>
+              </a:rPr>
+              <a:t># </a:t>
+            </a:r>
+            <a:r>
+              <a:rPr lang="en-US" sz="1800" dirty="0" err="1">
+                <a:latin typeface="Times New Roman" panose="02020603050405020304" pitchFamily="18" charset="0"/>
+                <a:cs typeface="Times New Roman" panose="02020603050405020304" pitchFamily="18" charset="0"/>
+              </a:rPr>
+              <a:t>ibov</a:t>
+            </a:r>
+            <a:r>
+              <a:rPr lang="en-US" sz="1800" dirty="0">
+                <a:latin typeface="Times New Roman" panose="02020603050405020304" pitchFamily="18" charset="0"/>
+                <a:cs typeface="Times New Roman" panose="02020603050405020304" pitchFamily="18" charset="0"/>
+              </a:rPr>
+              <a:t> = </a:t>
+            </a:r>
+            <a:r>
+              <a:rPr lang="en-US" sz="1800" dirty="0" err="1">
+                <a:latin typeface="Times New Roman" panose="02020603050405020304" pitchFamily="18" charset="0"/>
+                <a:cs typeface="Times New Roman" panose="02020603050405020304" pitchFamily="18" charset="0"/>
+              </a:rPr>
+              <a:t>yf.download</a:t>
+            </a:r>
+            <a:r>
+              <a:rPr lang="en-US" sz="1800" dirty="0">
+                <a:latin typeface="Times New Roman" panose="02020603050405020304" pitchFamily="18" charset="0"/>
+                <a:cs typeface="Times New Roman" panose="02020603050405020304" pitchFamily="18" charset="0"/>
+              </a:rPr>
+              <a:t>("^BVSP", start="2023-01-01", end="2024-12-31")</a:t>
+            </a:r>
+            <a:endParaRPr lang="pt-BR" sz="1800" dirty="0">
               <a:latin typeface="Times New Roman" panose="02020603050405020304" pitchFamily="18" charset="0"/>
               <a:cs typeface="Times New Roman" panose="02020603050405020304" pitchFamily="18" charset="0"/>
             </a:endParaRPr>
@@ -6699,58 +6867,13 @@
               <a:buNone/>
             </a:pPr>
             <a:r>
-              <a:rPr lang="pt-BR" sz="2000" dirty="0">
-                <a:latin typeface="Times New Roman" panose="02020603050405020304" pitchFamily="18" charset="0"/>
-                <a:cs typeface="Times New Roman" panose="02020603050405020304" pitchFamily="18" charset="0"/>
-              </a:rPr>
-              <a:t># Bolsa Bovespa</a:t>
-            </a:r>
-          </a:p>
-          <a:p>
-            <a:pPr marL="0" indent="0" algn="just">
-              <a:buNone/>
-            </a:pPr>
-            <a:r>
-              <a:rPr lang="pt-BR" sz="2000" dirty="0" err="1">
+              <a:rPr lang="pt-BR" sz="1800" dirty="0" err="1">
                 <a:latin typeface="Times New Roman" panose="02020603050405020304" pitchFamily="18" charset="0"/>
                 <a:cs typeface="Times New Roman" panose="02020603050405020304" pitchFamily="18" charset="0"/>
               </a:rPr>
               <a:t>ibov</a:t>
             </a:r>
-            <a:r>
-              <a:rPr lang="pt-BR" sz="2000" dirty="0">
-                <a:latin typeface="Times New Roman" panose="02020603050405020304" pitchFamily="18" charset="0"/>
-                <a:cs typeface="Times New Roman" panose="02020603050405020304" pitchFamily="18" charset="0"/>
-              </a:rPr>
-              <a:t> = </a:t>
-            </a:r>
-            <a:r>
-              <a:rPr lang="pt-BR" sz="2000" dirty="0" err="1">
-                <a:latin typeface="Times New Roman" panose="02020603050405020304" pitchFamily="18" charset="0"/>
-                <a:cs typeface="Times New Roman" panose="02020603050405020304" pitchFamily="18" charset="0"/>
-              </a:rPr>
-              <a:t>web.get_data_yahoo</a:t>
-            </a:r>
-            <a:r>
-              <a:rPr lang="pt-BR" sz="2000" dirty="0">
-                <a:latin typeface="Times New Roman" panose="02020603050405020304" pitchFamily="18" charset="0"/>
-                <a:cs typeface="Times New Roman" panose="02020603050405020304" pitchFamily="18" charset="0"/>
-              </a:rPr>
-              <a:t>('^BVSP')</a:t>
-            </a:r>
-          </a:p>
-          <a:p>
-            <a:pPr marL="0" indent="0" algn="just">
-              <a:buNone/>
-            </a:pPr>
-            <a:r>
-              <a:rPr lang="pt-BR" sz="2000" dirty="0" err="1">
-                <a:latin typeface="Times New Roman" panose="02020603050405020304" pitchFamily="18" charset="0"/>
-                <a:cs typeface="Times New Roman" panose="02020603050405020304" pitchFamily="18" charset="0"/>
-              </a:rPr>
-              <a:t>ibov</a:t>
-            </a:r>
-            <a:endParaRPr lang="pt-BR" sz="2000" dirty="0">
+            <a:endParaRPr lang="pt-BR" sz="1800" dirty="0">
               <a:latin typeface="Times New Roman" panose="02020603050405020304" pitchFamily="18" charset="0"/>
               <a:cs typeface="Times New Roman" panose="02020603050405020304" pitchFamily="18" charset="0"/>
             </a:endParaRPr>
@@ -6760,28 +6883,104 @@
               <a:buNone/>
             </a:pPr>
             <a:r>
-              <a:rPr lang="pt-BR" sz="2000" dirty="0" err="1">
+              <a:rPr lang="pt-BR" sz="1800" dirty="0" err="1">
                 <a:latin typeface="Times New Roman" panose="02020603050405020304" pitchFamily="18" charset="0"/>
                 <a:cs typeface="Times New Roman" panose="02020603050405020304" pitchFamily="18" charset="0"/>
               </a:rPr>
               <a:t>ibov</a:t>
             </a:r>
             <a:r>
-              <a:rPr lang="pt-BR" sz="2000" dirty="0">
+              <a:rPr lang="pt-BR" sz="1800" dirty="0">
                 <a:latin typeface="Times New Roman" panose="02020603050405020304" pitchFamily="18" charset="0"/>
                 <a:cs typeface="Times New Roman" panose="02020603050405020304" pitchFamily="18" charset="0"/>
               </a:rPr>
               <a:t>['Close'].</a:t>
             </a:r>
             <a:r>
-              <a:rPr lang="pt-BR" sz="2000" dirty="0" err="1">
+              <a:rPr lang="pt-BR" sz="1800" dirty="0" err="1">
                 <a:latin typeface="Times New Roman" panose="02020603050405020304" pitchFamily="18" charset="0"/>
                 <a:cs typeface="Times New Roman" panose="02020603050405020304" pitchFamily="18" charset="0"/>
               </a:rPr>
               <a:t>plot</a:t>
             </a:r>
             <a:r>
-              <a:rPr lang="pt-BR" sz="2000" dirty="0">
+              <a:rPr lang="pt-BR" sz="1800" dirty="0"/>
+              <a:t>(</a:t>
+            </a:r>
+            <a:r>
+              <a:rPr lang="pt-BR" sz="1800" dirty="0" err="1"/>
+              <a:t>figsize</a:t>
+            </a:r>
+            <a:r>
+              <a:rPr lang="pt-BR" sz="1800" dirty="0"/>
+              <a:t>=(12,5))</a:t>
+            </a:r>
+          </a:p>
+          <a:p>
+            <a:pPr marL="0" indent="0" algn="just">
+              <a:buNone/>
+            </a:pPr>
+            <a:r>
+              <a:rPr lang="pt-BR" sz="1800" dirty="0" err="1">
+                <a:latin typeface="Times New Roman" panose="02020603050405020304" pitchFamily="18" charset="0"/>
+                <a:cs typeface="Times New Roman" panose="02020603050405020304" pitchFamily="18" charset="0"/>
+              </a:rPr>
+              <a:t>plt.title</a:t>
+            </a:r>
+            <a:r>
+              <a:rPr lang="pt-BR" sz="1800" dirty="0">
+                <a:latin typeface="Times New Roman" panose="02020603050405020304" pitchFamily="18" charset="0"/>
+                <a:cs typeface="Times New Roman" panose="02020603050405020304" pitchFamily="18" charset="0"/>
+              </a:rPr>
+              <a:t>("IBOVESPA - Fechamento")</a:t>
+            </a:r>
+          </a:p>
+          <a:p>
+            <a:pPr marL="0" indent="0" algn="just">
+              <a:buNone/>
+            </a:pPr>
+            <a:r>
+              <a:rPr lang="pt-BR" sz="1800" dirty="0" err="1">
+                <a:latin typeface="Times New Roman" panose="02020603050405020304" pitchFamily="18" charset="0"/>
+                <a:cs typeface="Times New Roman" panose="02020603050405020304" pitchFamily="18" charset="0"/>
+              </a:rPr>
+              <a:t>plt.grid</a:t>
+            </a:r>
+            <a:r>
+              <a:rPr lang="pt-BR" sz="1800" dirty="0">
+                <a:latin typeface="Times New Roman" panose="02020603050405020304" pitchFamily="18" charset="0"/>
+                <a:cs typeface="Times New Roman" panose="02020603050405020304" pitchFamily="18" charset="0"/>
+              </a:rPr>
+              <a:t>(</a:t>
+            </a:r>
+            <a:r>
+              <a:rPr lang="pt-BR" sz="1800" dirty="0" err="1">
+                <a:latin typeface="Times New Roman" panose="02020603050405020304" pitchFamily="18" charset="0"/>
+                <a:cs typeface="Times New Roman" panose="02020603050405020304" pitchFamily="18" charset="0"/>
+              </a:rPr>
+              <a:t>True</a:t>
+            </a:r>
+            <a:r>
+              <a:rPr lang="pt-BR" sz="1800" dirty="0">
+                <a:latin typeface="Times New Roman" panose="02020603050405020304" pitchFamily="18" charset="0"/>
+                <a:cs typeface="Times New Roman" panose="02020603050405020304" pitchFamily="18" charset="0"/>
+              </a:rPr>
+              <a:t>)</a:t>
+            </a:r>
+          </a:p>
+          <a:p>
+            <a:pPr marL="0" indent="0" algn="just">
+              <a:buNone/>
+            </a:pPr>
+            <a:r>
+              <a:rPr lang="pt-BR" sz="1800" dirty="0" err="1">
+                <a:latin typeface="Times New Roman" panose="02020603050405020304" pitchFamily="18" charset="0"/>
+                <a:cs typeface="Times New Roman" panose="02020603050405020304" pitchFamily="18" charset="0"/>
+              </a:rPr>
+              <a:t>plt.show</a:t>
+            </a:r>
+            <a:r>
+              <a:rPr lang="pt-BR" sz="1800" dirty="0">
                 <a:latin typeface="Times New Roman" panose="02020603050405020304" pitchFamily="18" charset="0"/>
                 <a:cs typeface="Times New Roman" panose="02020603050405020304" pitchFamily="18" charset="0"/>
               </a:rPr>
@@ -6793,154 +6992,145 @@
               <a:buNone/>
             </a:pPr>
             <a:r>
-              <a:rPr lang="pt-BR" sz="2000" dirty="0" err="1">
+              <a:rPr lang="pt-BR" sz="1800" dirty="0" err="1">
                 <a:latin typeface="Times New Roman" panose="02020603050405020304" pitchFamily="18" charset="0"/>
                 <a:cs typeface="Times New Roman" panose="02020603050405020304" pitchFamily="18" charset="0"/>
               </a:rPr>
               <a:t>ibov</a:t>
             </a:r>
             <a:r>
-              <a:rPr lang="pt-BR" sz="2000" dirty="0">
+              <a:rPr lang="pt-BR" sz="1800" dirty="0">
                 <a:latin typeface="Times New Roman" panose="02020603050405020304" pitchFamily="18" charset="0"/>
                 <a:cs typeface="Times New Roman" panose="02020603050405020304" pitchFamily="18" charset="0"/>
               </a:rPr>
               <a:t>['</a:t>
             </a:r>
             <a:r>
-              <a:rPr lang="pt-BR" sz="2000" dirty="0" err="1">
+              <a:rPr lang="pt-BR" sz="1800" dirty="0" err="1">
                 <a:latin typeface="Times New Roman" panose="02020603050405020304" pitchFamily="18" charset="0"/>
                 <a:cs typeface="Times New Roman" panose="02020603050405020304" pitchFamily="18" charset="0"/>
               </a:rPr>
               <a:t>Dif</a:t>
             </a:r>
             <a:r>
-              <a:rPr lang="pt-BR" sz="2000" dirty="0">
+              <a:rPr lang="pt-BR" sz="1800" dirty="0">
                 <a:latin typeface="Times New Roman" panose="02020603050405020304" pitchFamily="18" charset="0"/>
                 <a:cs typeface="Times New Roman" panose="02020603050405020304" pitchFamily="18" charset="0"/>
               </a:rPr>
               <a:t>'] = </a:t>
             </a:r>
             <a:r>
-              <a:rPr lang="pt-BR" sz="2000" dirty="0" err="1">
+              <a:rPr lang="pt-BR" sz="1800" dirty="0" err="1">
                 <a:latin typeface="Times New Roman" panose="02020603050405020304" pitchFamily="18" charset="0"/>
                 <a:cs typeface="Times New Roman" panose="02020603050405020304" pitchFamily="18" charset="0"/>
               </a:rPr>
               <a:t>ibov</a:t>
             </a:r>
             <a:r>
-              <a:rPr lang="pt-BR" sz="2000" dirty="0">
+              <a:rPr lang="pt-BR" sz="1800" dirty="0">
                 <a:latin typeface="Times New Roman" panose="02020603050405020304" pitchFamily="18" charset="0"/>
                 <a:cs typeface="Times New Roman" panose="02020603050405020304" pitchFamily="18" charset="0"/>
               </a:rPr>
               <a:t>['Close'] - </a:t>
             </a:r>
             <a:r>
-              <a:rPr lang="pt-BR" sz="2000" dirty="0" err="1">
+              <a:rPr lang="pt-BR" sz="1800" dirty="0" err="1">
                 <a:latin typeface="Times New Roman" panose="02020603050405020304" pitchFamily="18" charset="0"/>
                 <a:cs typeface="Times New Roman" panose="02020603050405020304" pitchFamily="18" charset="0"/>
               </a:rPr>
               <a:t>ibov</a:t>
             </a:r>
             <a:r>
-              <a:rPr lang="pt-BR" sz="2000" dirty="0">
-                <a:latin typeface="Times New Roman" panose="02020603050405020304" pitchFamily="18" charset="0"/>
-                <a:cs typeface="Times New Roman" panose="02020603050405020304" pitchFamily="18" charset="0"/>
-              </a:rPr>
-              <a:t>['Open’]</a:t>
-            </a:r>
-          </a:p>
-          <a:p>
-            <a:pPr marL="0" indent="0" algn="just">
-              <a:buNone/>
-            </a:pPr>
-            <a:endParaRPr lang="pt-BR" sz="2000" dirty="0">
-              <a:latin typeface="Times New Roman" panose="02020603050405020304" pitchFamily="18" charset="0"/>
-              <a:cs typeface="Times New Roman" panose="02020603050405020304" pitchFamily="18" charset="0"/>
-            </a:endParaRPr>
-          </a:p>
-          <a:p>
-            <a:pPr marL="0" indent="0" algn="just">
-              <a:buNone/>
-            </a:pPr>
-            <a:r>
-              <a:rPr lang="pt-BR" sz="2000" dirty="0" err="1">
+              <a:rPr lang="pt-BR" sz="1800" dirty="0">
+                <a:latin typeface="Times New Roman" panose="02020603050405020304" pitchFamily="18" charset="0"/>
+                <a:cs typeface="Times New Roman" panose="02020603050405020304" pitchFamily="18" charset="0"/>
+              </a:rPr>
+              <a:t>['Open']</a:t>
+            </a:r>
+          </a:p>
+          <a:p>
+            <a:pPr marL="0" indent="0" algn="just">
+              <a:buNone/>
+            </a:pPr>
+            <a:r>
+              <a:rPr lang="pt-BR" sz="1800" dirty="0" err="1">
                 <a:latin typeface="Times New Roman" panose="02020603050405020304" pitchFamily="18" charset="0"/>
                 <a:cs typeface="Times New Roman" panose="02020603050405020304" pitchFamily="18" charset="0"/>
               </a:rPr>
               <a:t>df</a:t>
             </a:r>
             <a:r>
-              <a:rPr lang="pt-BR" sz="2000" dirty="0">
+              <a:rPr lang="pt-BR" sz="1800" dirty="0">
                 <a:latin typeface="Times New Roman" panose="02020603050405020304" pitchFamily="18" charset="0"/>
                 <a:cs typeface="Times New Roman" panose="02020603050405020304" pitchFamily="18" charset="0"/>
               </a:rPr>
               <a:t> = </a:t>
             </a:r>
             <a:r>
-              <a:rPr lang="pt-BR" sz="2000" dirty="0" err="1">
+              <a:rPr lang="pt-BR" sz="1800" dirty="0" err="1">
                 <a:latin typeface="Times New Roman" panose="02020603050405020304" pitchFamily="18" charset="0"/>
                 <a:cs typeface="Times New Roman" panose="02020603050405020304" pitchFamily="18" charset="0"/>
               </a:rPr>
               <a:t>ibov.sort_values</a:t>
             </a:r>
             <a:r>
-              <a:rPr lang="pt-BR" sz="2000" dirty="0">
+              <a:rPr lang="pt-BR" sz="1800" dirty="0">
                 <a:latin typeface="Times New Roman" panose="02020603050405020304" pitchFamily="18" charset="0"/>
                 <a:cs typeface="Times New Roman" panose="02020603050405020304" pitchFamily="18" charset="0"/>
               </a:rPr>
               <a:t>(</a:t>
             </a:r>
             <a:r>
-              <a:rPr lang="pt-BR" sz="2000" dirty="0" err="1">
+              <a:rPr lang="pt-BR" sz="1800" dirty="0" err="1">
                 <a:latin typeface="Times New Roman" panose="02020603050405020304" pitchFamily="18" charset="0"/>
                 <a:cs typeface="Times New Roman" panose="02020603050405020304" pitchFamily="18" charset="0"/>
               </a:rPr>
               <a:t>by</a:t>
             </a:r>
             <a:r>
-              <a:rPr lang="pt-BR" sz="2000" dirty="0">
+              <a:rPr lang="pt-BR" sz="1800" dirty="0">
                 <a:latin typeface="Times New Roman" panose="02020603050405020304" pitchFamily="18" charset="0"/>
                 <a:cs typeface="Times New Roman" panose="02020603050405020304" pitchFamily="18" charset="0"/>
               </a:rPr>
               <a:t>=['</a:t>
             </a:r>
             <a:r>
-              <a:rPr lang="pt-BR" sz="2000" dirty="0" err="1">
+              <a:rPr lang="pt-BR" sz="1800" dirty="0" err="1">
                 <a:latin typeface="Times New Roman" panose="02020603050405020304" pitchFamily="18" charset="0"/>
                 <a:cs typeface="Times New Roman" panose="02020603050405020304" pitchFamily="18" charset="0"/>
               </a:rPr>
               <a:t>Dif</a:t>
             </a:r>
             <a:r>
-              <a:rPr lang="pt-BR" sz="2000" dirty="0">
+              <a:rPr lang="pt-BR" sz="1800" dirty="0">
                 <a:latin typeface="Times New Roman" panose="02020603050405020304" pitchFamily="18" charset="0"/>
                 <a:cs typeface="Times New Roman" panose="02020603050405020304" pitchFamily="18" charset="0"/>
               </a:rPr>
               <a:t>'], </a:t>
             </a:r>
             <a:r>
-              <a:rPr lang="pt-BR" sz="2000" dirty="0" err="1">
+              <a:rPr lang="pt-BR" sz="1800" dirty="0" err="1">
                 <a:latin typeface="Times New Roman" panose="02020603050405020304" pitchFamily="18" charset="0"/>
                 <a:cs typeface="Times New Roman" panose="02020603050405020304" pitchFamily="18" charset="0"/>
               </a:rPr>
               <a:t>ascending</a:t>
             </a:r>
             <a:r>
-              <a:rPr lang="pt-BR" sz="2000" dirty="0">
+              <a:rPr lang="pt-BR" sz="1800" dirty="0">
                 <a:latin typeface="Times New Roman" panose="02020603050405020304" pitchFamily="18" charset="0"/>
                 <a:cs typeface="Times New Roman" panose="02020603050405020304" pitchFamily="18" charset="0"/>
               </a:rPr>
               <a:t>=</a:t>
             </a:r>
             <a:r>
-              <a:rPr lang="pt-BR" sz="2000" dirty="0" err="1">
+              <a:rPr lang="pt-BR" sz="1800" dirty="0" err="1">
                 <a:latin typeface="Times New Roman" panose="02020603050405020304" pitchFamily="18" charset="0"/>
                 <a:cs typeface="Times New Roman" panose="02020603050405020304" pitchFamily="18" charset="0"/>
               </a:rPr>
               <a:t>True</a:t>
             </a:r>
             <a:r>
-              <a:rPr lang="pt-BR" sz="2000" dirty="0">
+              <a:rPr lang="pt-BR" sz="1800" dirty="0">
                 <a:latin typeface="Times New Roman" panose="02020603050405020304" pitchFamily="18" charset="0"/>
                 <a:cs typeface="Times New Roman" panose="02020603050405020304" pitchFamily="18" charset="0"/>
               </a:rPr>
@@ -6952,18 +7142,18 @@
               <a:buNone/>
             </a:pPr>
             <a:r>
-              <a:rPr lang="pt-BR" sz="2000" dirty="0" err="1">
-                <a:latin typeface="Times New Roman" panose="02020603050405020304" pitchFamily="18" charset="0"/>
-                <a:cs typeface="Times New Roman" panose="02020603050405020304" pitchFamily="18" charset="0"/>
-              </a:rPr>
-              <a:t>df</a:t>
-            </a:r>
-            <a:r>
-              <a:rPr lang="pt-BR" sz="2000" dirty="0">
-                <a:latin typeface="Times New Roman" panose="02020603050405020304" pitchFamily="18" charset="0"/>
-                <a:cs typeface="Times New Roman" panose="02020603050405020304" pitchFamily="18" charset="0"/>
-              </a:rPr>
-              <a:t>[:10]</a:t>
+              <a:rPr lang="pt-BR" sz="1800" dirty="0" err="1">
+                <a:latin typeface="Times New Roman" panose="02020603050405020304" pitchFamily="18" charset="0"/>
+                <a:cs typeface="Times New Roman" panose="02020603050405020304" pitchFamily="18" charset="0"/>
+              </a:rPr>
+              <a:t>df.head</a:t>
+            </a:r>
+            <a:r>
+              <a:rPr lang="pt-BR" sz="1800" dirty="0">
+                <a:latin typeface="Times New Roman" panose="02020603050405020304" pitchFamily="18" charset="0"/>
+                <a:cs typeface="Times New Roman" panose="02020603050405020304" pitchFamily="18" charset="0"/>
+              </a:rPr>
+              <a:t>(10)    #df[:10]</a:t>
             </a:r>
           </a:p>
         </p:txBody>
@@ -7063,7 +7253,10 @@
               <a:buNone/>
             </a:pPr>
             <a:r>
-              <a:rPr lang="pt-BR" sz="2000" dirty="0">
+              <a:rPr lang="pt-BR" sz="2000" b="1" dirty="0">
+                <a:solidFill>
+                  <a:srgbClr val="FF0000"/>
+                </a:solidFill>
                 <a:latin typeface="Times New Roman" panose="02020603050405020304" pitchFamily="18" charset="0"/>
                 <a:cs typeface="Times New Roman" panose="02020603050405020304" pitchFamily="18" charset="0"/>
               </a:rPr>
@@ -7084,37 +7277,124 @@
               <a:buNone/>
             </a:pPr>
             <a:r>
-              <a:rPr lang="pt-BR" sz="2000" dirty="0">
-                <a:latin typeface="Times New Roman" panose="02020603050405020304" pitchFamily="18" charset="0"/>
-                <a:cs typeface="Times New Roman" panose="02020603050405020304" pitchFamily="18" charset="0"/>
-              </a:rPr>
-              <a:t>google = </a:t>
+              <a:rPr lang="pt-BR" sz="2000" b="1" dirty="0">
+                <a:latin typeface="Times New Roman" panose="02020603050405020304" pitchFamily="18" charset="0"/>
+                <a:cs typeface="Times New Roman" panose="02020603050405020304" pitchFamily="18" charset="0"/>
+              </a:rPr>
+              <a:t>google</a:t>
+            </a:r>
+            <a:r>
+              <a:rPr lang="pt-BR" sz="2000" dirty="0">
+                <a:latin typeface="Times New Roman" panose="02020603050405020304" pitchFamily="18" charset="0"/>
+                <a:cs typeface="Times New Roman" panose="02020603050405020304" pitchFamily="18" charset="0"/>
+              </a:rPr>
+              <a:t> = </a:t>
             </a:r>
             <a:r>
               <a:rPr lang="pt-BR" sz="2000" dirty="0" err="1">
                 <a:latin typeface="Times New Roman" panose="02020603050405020304" pitchFamily="18" charset="0"/>
                 <a:cs typeface="Times New Roman" panose="02020603050405020304" pitchFamily="18" charset="0"/>
               </a:rPr>
-              <a:t>web.get_data_yahoo</a:t>
-            </a:r>
-            <a:r>
-              <a:rPr lang="pt-BR" sz="2000" dirty="0">
-                <a:latin typeface="Times New Roman" panose="02020603050405020304" pitchFamily="18" charset="0"/>
-                <a:cs typeface="Times New Roman" panose="02020603050405020304" pitchFamily="18" charset="0"/>
-              </a:rPr>
-              <a:t>('GOOG')</a:t>
-            </a:r>
-          </a:p>
-          <a:p>
-            <a:pPr marL="0" indent="0" algn="just">
-              <a:buNone/>
-            </a:pPr>
-            <a:r>
-              <a:rPr lang="pt-BR" sz="2000" dirty="0">
-                <a:latin typeface="Times New Roman" panose="02020603050405020304" pitchFamily="18" charset="0"/>
-                <a:cs typeface="Times New Roman" panose="02020603050405020304" pitchFamily="18" charset="0"/>
-              </a:rPr>
-              <a:t>google['Close'].</a:t>
+              <a:t>yf.download</a:t>
+            </a:r>
+            <a:r>
+              <a:rPr lang="pt-BR" sz="2000" dirty="0">
+                <a:latin typeface="Times New Roman" panose="02020603050405020304" pitchFamily="18" charset="0"/>
+                <a:cs typeface="Times New Roman" panose="02020603050405020304" pitchFamily="18" charset="0"/>
+              </a:rPr>
+              <a:t>(</a:t>
+            </a:r>
+            <a:r>
+              <a:rPr lang="pt-BR" sz="2000" b="1" dirty="0">
+                <a:solidFill>
+                  <a:srgbClr val="FF0000"/>
+                </a:solidFill>
+                <a:latin typeface="Times New Roman" panose="02020603050405020304" pitchFamily="18" charset="0"/>
+                <a:cs typeface="Times New Roman" panose="02020603050405020304" pitchFamily="18" charset="0"/>
+              </a:rPr>
+              <a:t>'GOOG</a:t>
+            </a:r>
+            <a:r>
+              <a:rPr lang="pt-BR" sz="2000" dirty="0">
+                <a:latin typeface="Times New Roman" panose="02020603050405020304" pitchFamily="18" charset="0"/>
+                <a:cs typeface="Times New Roman" panose="02020603050405020304" pitchFamily="18" charset="0"/>
+              </a:rPr>
+              <a:t>', </a:t>
+            </a:r>
+            <a:r>
+              <a:rPr lang="pt-BR" sz="2000" dirty="0" err="1">
+                <a:latin typeface="Times New Roman" panose="02020603050405020304" pitchFamily="18" charset="0"/>
+                <a:cs typeface="Times New Roman" panose="02020603050405020304" pitchFamily="18" charset="0"/>
+              </a:rPr>
+              <a:t>period</a:t>
+            </a:r>
+            <a:r>
+              <a:rPr lang="pt-BR" sz="2000" dirty="0">
+                <a:latin typeface="Times New Roman" panose="02020603050405020304" pitchFamily="18" charset="0"/>
+                <a:cs typeface="Times New Roman" panose="02020603050405020304" pitchFamily="18" charset="0"/>
+              </a:rPr>
+              <a:t>='</a:t>
+            </a:r>
+            <a:r>
+              <a:rPr lang="pt-BR" sz="2000" dirty="0" err="1">
+                <a:latin typeface="Times New Roman" panose="02020603050405020304" pitchFamily="18" charset="0"/>
+                <a:cs typeface="Times New Roman" panose="02020603050405020304" pitchFamily="18" charset="0"/>
+              </a:rPr>
+              <a:t>max</a:t>
+            </a:r>
+            <a:r>
+              <a:rPr lang="pt-BR" sz="2000" dirty="0">
+                <a:latin typeface="Times New Roman" panose="02020603050405020304" pitchFamily="18" charset="0"/>
+                <a:cs typeface="Times New Roman" panose="02020603050405020304" pitchFamily="18" charset="0"/>
+              </a:rPr>
+              <a:t>’, </a:t>
+            </a:r>
+            <a:r>
+              <a:rPr lang="pt-BR" sz="2000" dirty="0" err="1">
+                <a:latin typeface="Times New Roman" panose="02020603050405020304" pitchFamily="18" charset="0"/>
+                <a:cs typeface="Times New Roman" panose="02020603050405020304" pitchFamily="18" charset="0"/>
+              </a:rPr>
+              <a:t>auto_adjust</a:t>
+            </a:r>
+            <a:r>
+              <a:rPr lang="pt-BR" sz="2000" dirty="0">
+                <a:latin typeface="Times New Roman" panose="02020603050405020304" pitchFamily="18" charset="0"/>
+                <a:cs typeface="Times New Roman" panose="02020603050405020304" pitchFamily="18" charset="0"/>
+              </a:rPr>
+              <a:t>=</a:t>
+            </a:r>
+            <a:r>
+              <a:rPr lang="pt-BR" sz="2000" dirty="0" err="1">
+                <a:latin typeface="Times New Roman" panose="02020603050405020304" pitchFamily="18" charset="0"/>
+                <a:cs typeface="Times New Roman" panose="02020603050405020304" pitchFamily="18" charset="0"/>
+              </a:rPr>
+              <a:t>True</a:t>
+            </a:r>
+            <a:r>
+              <a:rPr lang="pt-BR" sz="2000" dirty="0">
+                <a:latin typeface="Times New Roman" panose="02020603050405020304" pitchFamily="18" charset="0"/>
+                <a:cs typeface="Times New Roman" panose="02020603050405020304" pitchFamily="18" charset="0"/>
+              </a:rPr>
+              <a:t>)</a:t>
+            </a:r>
+          </a:p>
+          <a:p>
+            <a:pPr marL="0" indent="0" algn="just">
+              <a:buNone/>
+            </a:pPr>
+            <a:r>
+              <a:rPr lang="pt-BR" sz="2000" b="1" dirty="0">
+                <a:latin typeface="Times New Roman" panose="02020603050405020304" pitchFamily="18" charset="0"/>
+                <a:cs typeface="Times New Roman" panose="02020603050405020304" pitchFamily="18" charset="0"/>
+              </a:rPr>
+              <a:t>google</a:t>
+            </a:r>
+            <a:r>
+              <a:rPr lang="pt-BR" sz="2000" dirty="0">
+                <a:latin typeface="Times New Roman" panose="02020603050405020304" pitchFamily="18" charset="0"/>
+                <a:cs typeface="Times New Roman" panose="02020603050405020304" pitchFamily="18" charset="0"/>
+              </a:rPr>
+              <a:t>['Close'].</a:t>
             </a:r>
             <a:r>
               <a:rPr lang="pt-BR" sz="2000" dirty="0" err="1">
@@ -7166,39 +7446,39 @@
               <a:buNone/>
             </a:pPr>
             <a:r>
+              <a:rPr lang="pt-BR" sz="2000" b="1" dirty="0" err="1">
+                <a:latin typeface="Times New Roman" panose="02020603050405020304" pitchFamily="18" charset="0"/>
+                <a:cs typeface="Times New Roman" panose="02020603050405020304" pitchFamily="18" charset="0"/>
+              </a:rPr>
+              <a:t>googleM</a:t>
+            </a:r>
+            <a:r>
+              <a:rPr lang="pt-BR" sz="2000" dirty="0">
+                <a:latin typeface="Times New Roman" panose="02020603050405020304" pitchFamily="18" charset="0"/>
+                <a:cs typeface="Times New Roman" panose="02020603050405020304" pitchFamily="18" charset="0"/>
+              </a:rPr>
+              <a:t> = </a:t>
+            </a:r>
+            <a:r>
               <a:rPr lang="pt-BR" sz="2000" dirty="0" err="1">
                 <a:latin typeface="Times New Roman" panose="02020603050405020304" pitchFamily="18" charset="0"/>
                 <a:cs typeface="Times New Roman" panose="02020603050405020304" pitchFamily="18" charset="0"/>
               </a:rPr>
-              <a:t>googleM</a:t>
-            </a:r>
-            <a:r>
-              <a:rPr lang="pt-BR" sz="2000" dirty="0">
-                <a:latin typeface="Times New Roman" panose="02020603050405020304" pitchFamily="18" charset="0"/>
-                <a:cs typeface="Times New Roman" panose="02020603050405020304" pitchFamily="18" charset="0"/>
-              </a:rPr>
-              <a:t> = </a:t>
+              <a:t>google.resample</a:t>
+            </a:r>
+            <a:r>
+              <a:rPr lang="pt-BR" sz="2000" dirty="0">
+                <a:latin typeface="Times New Roman" panose="02020603050405020304" pitchFamily="18" charset="0"/>
+                <a:cs typeface="Times New Roman" panose="02020603050405020304" pitchFamily="18" charset="0"/>
+              </a:rPr>
+              <a:t>('ME’).</a:t>
             </a:r>
             <a:r>
               <a:rPr lang="pt-BR" sz="2000" dirty="0" err="1">
                 <a:latin typeface="Times New Roman" panose="02020603050405020304" pitchFamily="18" charset="0"/>
                 <a:cs typeface="Times New Roman" panose="02020603050405020304" pitchFamily="18" charset="0"/>
               </a:rPr>
-              <a:t>google.resample</a:t>
-            </a:r>
-            <a:r>
-              <a:rPr lang="pt-BR" sz="2000" dirty="0">
-                <a:latin typeface="Times New Roman" panose="02020603050405020304" pitchFamily="18" charset="0"/>
-                <a:cs typeface="Times New Roman" panose="02020603050405020304" pitchFamily="18" charset="0"/>
-              </a:rPr>
-              <a:t>('M').</a:t>
-            </a:r>
-            <a:r>
-              <a:rPr lang="pt-BR" sz="2000" dirty="0" err="1">
-                <a:latin typeface="Times New Roman" panose="02020603050405020304" pitchFamily="18" charset="0"/>
-                <a:cs typeface="Times New Roman" panose="02020603050405020304" pitchFamily="18" charset="0"/>
-              </a:rPr>
-              <a:t>max</a:t>
+              <a:t>last</a:t>
             </a:r>
             <a:r>
               <a:rPr lang="pt-BR" sz="2000" dirty="0">
@@ -7292,7 +7572,7 @@
         <p:spPr>
           <a:xfrm>
             <a:off x="142865" y="1200150"/>
-            <a:ext cx="8865056" cy="3737370"/>
+            <a:ext cx="8865056" cy="3829050"/>
           </a:xfrm>
         </p:spPr>
         <p:txBody>
@@ -7409,7 +7689,7 @@
               <a:t> </a:t>
             </a:r>
             <a:r>
-              <a:rPr lang="pt-BR" sz="2000" dirty="0" err="1">
+              <a:rPr lang="pt-BR" sz="2000" b="1" dirty="0" err="1">
                 <a:latin typeface="Times New Roman" panose="02020603050405020304" pitchFamily="18" charset="0"/>
                 <a:cs typeface="Times New Roman" panose="02020603050405020304" pitchFamily="18" charset="0"/>
               </a:rPr>
@@ -7469,7 +7749,7 @@
               <a:t> </a:t>
             </a:r>
             <a:r>
-              <a:rPr lang="pt-BR" sz="2000" dirty="0" err="1">
+              <a:rPr lang="pt-BR" sz="2000" b="1" dirty="0" err="1">
                 <a:latin typeface="Times New Roman" panose="02020603050405020304" pitchFamily="18" charset="0"/>
                 <a:cs typeface="Times New Roman" panose="02020603050405020304" pitchFamily="18" charset="0"/>
               </a:rPr>
@@ -7499,7 +7779,10 @@
               <a:buNone/>
             </a:pPr>
             <a:r>
-              <a:rPr lang="pt-BR" sz="2000" dirty="0" err="1">
+              <a:rPr lang="pt-BR" sz="2000" b="1" dirty="0" err="1">
+                <a:solidFill>
+                  <a:srgbClr val="FF0000"/>
+                </a:solidFill>
                 <a:latin typeface="Times New Roman" panose="02020603050405020304" pitchFamily="18" charset="0"/>
                 <a:cs typeface="Times New Roman" panose="02020603050405020304" pitchFamily="18" charset="0"/>
               </a:rPr>
@@ -7573,7 +7856,7 @@
               <a:t> </a:t>
             </a:r>
             <a:r>
-              <a:rPr lang="pt-BR" sz="2000" dirty="0" err="1">
+              <a:rPr lang="pt-BR" sz="2000" b="1" dirty="0" err="1">
                 <a:latin typeface="Times New Roman" panose="02020603050405020304" pitchFamily="18" charset="0"/>
                 <a:cs typeface="Times New Roman" panose="02020603050405020304" pitchFamily="18" charset="0"/>
               </a:rPr>
@@ -7592,7 +7875,10 @@
               <a:buNone/>
             </a:pPr>
             <a:r>
-              <a:rPr lang="pt-BR" sz="2000" dirty="0" err="1">
+              <a:rPr lang="pt-BR" sz="2000" b="1" dirty="0" err="1">
+                <a:solidFill>
+                  <a:srgbClr val="FF0000"/>
+                </a:solidFill>
                 <a:latin typeface="Times New Roman" panose="02020603050405020304" pitchFamily="18" charset="0"/>
                 <a:cs typeface="Times New Roman" panose="02020603050405020304" pitchFamily="18" charset="0"/>
               </a:rPr>
@@ -10973,42 +11259,14 @@
                 <a:latin typeface="Times New Roman" panose="02020603050405020304" pitchFamily="18" charset="0"/>
                 <a:cs typeface="Times New Roman" panose="02020603050405020304" pitchFamily="18" charset="0"/>
               </a:rPr>
-              <a:t>Python</a:t>
+              <a:t>	Python</a:t>
             </a:r>
             <a:r>
               <a:rPr lang="pt-BR" sz="2400" dirty="0">
                 <a:latin typeface="Times New Roman" panose="02020603050405020304" pitchFamily="18" charset="0"/>
                 <a:cs typeface="Times New Roman" panose="02020603050405020304" pitchFamily="18" charset="0"/>
               </a:rPr>
-              <a:t> é usada por empresas como Intel, NASA, Netflix, </a:t>
-            </a:r>
-            <a:r>
-              <a:rPr lang="pt-BR" sz="2400" dirty="0" err="1">
-                <a:latin typeface="Times New Roman" panose="02020603050405020304" pitchFamily="18" charset="0"/>
-                <a:cs typeface="Times New Roman" panose="02020603050405020304" pitchFamily="18" charset="0"/>
-              </a:rPr>
-              <a:t>Spotify</a:t>
-            </a:r>
-            <a:r>
-              <a:rPr lang="pt-BR" sz="2400" dirty="0">
-                <a:latin typeface="Times New Roman" panose="02020603050405020304" pitchFamily="18" charset="0"/>
-                <a:cs typeface="Times New Roman" panose="02020603050405020304" pitchFamily="18" charset="0"/>
-              </a:rPr>
-              <a:t>, IBM, uma das linguagens mais utilizadas em instituições financeiras e </a:t>
-            </a:r>
-            <a:r>
-              <a:rPr lang="pt-BR" sz="2400" dirty="0" err="1">
-                <a:latin typeface="Times New Roman" panose="02020603050405020304" pitchFamily="18" charset="0"/>
-                <a:cs typeface="Times New Roman" panose="02020603050405020304" pitchFamily="18" charset="0"/>
-              </a:rPr>
-              <a:t>fintechs</a:t>
-            </a:r>
-            <a:r>
-              <a:rPr lang="pt-BR" sz="2400" dirty="0">
-                <a:latin typeface="Times New Roman" panose="02020603050405020304" pitchFamily="18" charset="0"/>
-                <a:cs typeface="Times New Roman" panose="02020603050405020304" pitchFamily="18" charset="0"/>
-              </a:rPr>
-              <a:t>,  dentre outras.</a:t>
+              <a:t> é usada por empresas como Intel, NASA, Netflix, Spotify, IBM, uma das linguagens mais utilizadas em instituições financeiras e fintechs,  dentre outras.</a:t>
             </a:r>
           </a:p>
           <a:p>
@@ -11029,7 +11287,7 @@
                 <a:latin typeface="Times New Roman" panose="02020603050405020304" pitchFamily="18" charset="0"/>
                 <a:cs typeface="Times New Roman" panose="02020603050405020304" pitchFamily="18" charset="0"/>
               </a:rPr>
-              <a:t>É versátil, fácil de ler e usado para tudo, desde desenvolvimento web até aprendizado de máquina.</a:t>
+              <a:t>	É versátil, fácil de ler e usado para tudo, desde desenvolvimento web até aprendizado de máquina.</a:t>
             </a:r>
           </a:p>
           <a:p>
@@ -11502,7 +11760,7 @@
                 <a:latin typeface="Times New Roman" panose="02020603050405020304" pitchFamily="18" charset="0"/>
                 <a:cs typeface="Times New Roman" panose="02020603050405020304" pitchFamily="18" charset="0"/>
               </a:rPr>
-              <a:t>O </a:t>
+              <a:t>	O </a:t>
             </a:r>
             <a:r>
               <a:rPr lang="pt-BR" sz="2000" b="1" dirty="0" err="1">
@@ -11763,7 +12021,21 @@
                 <a:latin typeface="Times New Roman" panose="02020603050405020304" pitchFamily="18" charset="0"/>
                 <a:cs typeface="Times New Roman" panose="02020603050405020304" pitchFamily="18" charset="0"/>
               </a:rPr>
-              <a:t>Os SO baseados no </a:t>
+              <a:t>Os </a:t>
+            </a:r>
+            <a:r>
+              <a:rPr lang="pt-BR" sz="2000" b="1" dirty="0" err="1">
+                <a:latin typeface="Times New Roman" panose="02020603050405020304" pitchFamily="18" charset="0"/>
+                <a:cs typeface="Times New Roman" panose="02020603050405020304" pitchFamily="18" charset="0"/>
+              </a:rPr>
+              <a:t>SO’s</a:t>
+            </a:r>
+            <a:r>
+              <a:rPr lang="pt-BR" sz="2000" dirty="0">
+                <a:latin typeface="Times New Roman" panose="02020603050405020304" pitchFamily="18" charset="0"/>
+                <a:cs typeface="Times New Roman" panose="02020603050405020304" pitchFamily="18" charset="0"/>
+              </a:rPr>
+              <a:t> baseados no </a:t>
             </a:r>
             <a:r>
               <a:rPr lang="pt-BR" sz="2000" b="1" dirty="0">
@@ -11836,7 +12108,14 @@
                 <a:latin typeface="Times New Roman" panose="02020603050405020304" pitchFamily="18" charset="0"/>
                 <a:cs typeface="Times New Roman" panose="02020603050405020304" pitchFamily="18" charset="0"/>
               </a:rPr>
-              <a:t> update</a:t>
+              <a:t> </a:t>
+            </a:r>
+            <a:r>
+              <a:rPr lang="pt-BR" sz="2000" b="1" dirty="0">
+                <a:latin typeface="Times New Roman" panose="02020603050405020304" pitchFamily="18" charset="0"/>
+                <a:cs typeface="Times New Roman" panose="02020603050405020304" pitchFamily="18" charset="0"/>
+              </a:rPr>
+              <a:t>update</a:t>
             </a:r>
           </a:p>
           <a:p>
@@ -11872,7 +12151,7 @@
               <a:t> </a:t>
             </a:r>
             <a:r>
-              <a:rPr lang="pt-BR" sz="2000" dirty="0" err="1">
+              <a:rPr lang="pt-BR" sz="2000" b="1" dirty="0" err="1">
                 <a:latin typeface="Times New Roman" panose="02020603050405020304" pitchFamily="18" charset="0"/>
                 <a:cs typeface="Times New Roman" panose="02020603050405020304" pitchFamily="18" charset="0"/>
               </a:rPr>
@@ -12031,6 +12310,9 @@
             </a:r>
             <a:r>
               <a:rPr lang="pt-BR" sz="2000" b="1" dirty="0" err="1">
+                <a:solidFill>
+                  <a:srgbClr val="FF0000"/>
+                </a:solidFill>
                 <a:latin typeface="Times New Roman" panose="02020603050405020304" pitchFamily="18" charset="0"/>
                 <a:cs typeface="Times New Roman" panose="02020603050405020304" pitchFamily="18" charset="0"/>
               </a:rPr>
@@ -12069,7 +12351,14 @@
                 <a:latin typeface="Times New Roman" panose="02020603050405020304" pitchFamily="18" charset="0"/>
                 <a:cs typeface="Times New Roman" panose="02020603050405020304" pitchFamily="18" charset="0"/>
               </a:rPr>
-              <a:t> update</a:t>
+              <a:t> </a:t>
+            </a:r>
+            <a:r>
+              <a:rPr lang="pt-BR" sz="2000" b="1" dirty="0">
+                <a:latin typeface="Times New Roman" panose="02020603050405020304" pitchFamily="18" charset="0"/>
+                <a:cs typeface="Times New Roman" panose="02020603050405020304" pitchFamily="18" charset="0"/>
+              </a:rPr>
+              <a:t>update</a:t>
             </a:r>
           </a:p>
           <a:p>
@@ -12091,7 +12380,7 @@
               <a:t> </a:t>
             </a:r>
             <a:r>
-              <a:rPr lang="pt-BR" sz="2000" dirty="0" err="1">
+              <a:rPr lang="pt-BR" sz="2000" b="1" dirty="0" err="1">
                 <a:latin typeface="Times New Roman" panose="02020603050405020304" pitchFamily="18" charset="0"/>
                 <a:cs typeface="Times New Roman" panose="02020603050405020304" pitchFamily="18" charset="0"/>
               </a:rPr>
@@ -12347,7 +12636,7 @@
               <a:t>Diferente do </a:t>
             </a:r>
             <a:r>
-              <a:rPr lang="pt-BR" sz="2000" dirty="0" err="1">
+              <a:rPr lang="pt-BR" sz="2000" b="1" dirty="0" err="1">
                 <a:latin typeface="Times New Roman" panose="02020603050405020304" pitchFamily="18" charset="0"/>
                 <a:cs typeface="Times New Roman" panose="02020603050405020304" pitchFamily="18" charset="0"/>
               </a:rPr>
@@ -12361,7 +12650,10 @@
               <a:t> o </a:t>
             </a:r>
             <a:r>
-              <a:rPr lang="pt-BR" sz="2000" dirty="0" err="1">
+              <a:rPr lang="pt-BR" sz="2000" b="1" dirty="0" err="1">
+                <a:solidFill>
+                  <a:srgbClr val="FF0000"/>
+                </a:solidFill>
                 <a:latin typeface="Times New Roman" panose="02020603050405020304" pitchFamily="18" charset="0"/>
                 <a:cs typeface="Times New Roman" panose="02020603050405020304" pitchFamily="18" charset="0"/>
               </a:rPr>

--- a/01 Classes/Aula 07 - Aplicação Cloud Indústria 40 Python IoT Plataforma Outras Soluções.pptx
+++ b/01 Classes/Aula 07 - Aplicação Cloud Indústria 40 Python IoT Plataforma Outras Soluções.pptx
@@ -6021,7 +6021,7 @@
                 <a:latin typeface="Times New Roman" panose="02020603050405020304" pitchFamily="18" charset="0"/>
                 <a:cs typeface="Times New Roman" panose="02020603050405020304" pitchFamily="18" charset="0"/>
               </a:rPr>
-              <a:t>ipykernell</a:t>
+              <a:t>ipykernel</a:t>
             </a:r>
             <a:endParaRPr lang="pt-BR" sz="2000" dirty="0">
               <a:latin typeface="Times New Roman" panose="02020603050405020304" pitchFamily="18" charset="0"/>
@@ -7347,7 +7347,7 @@
                 <a:latin typeface="Times New Roman" panose="02020603050405020304" pitchFamily="18" charset="0"/>
                 <a:cs typeface="Times New Roman" panose="02020603050405020304" pitchFamily="18" charset="0"/>
               </a:rPr>
-              <a:t>’, </a:t>
+              <a:t>', </a:t>
             </a:r>
             <a:r>
               <a:rPr lang="pt-BR" sz="2000" dirty="0" err="1">
@@ -7429,7 +7429,7 @@
                 <a:latin typeface="Times New Roman" panose="02020603050405020304" pitchFamily="18" charset="0"/>
                 <a:cs typeface="Times New Roman" panose="02020603050405020304" pitchFamily="18" charset="0"/>
               </a:rPr>
-              <a:t>#google['Dif'] = google['Close'] - google['Open’]</a:t>
+              <a:t>#google['Dif'] = google['Close'] - google['Open']</a:t>
             </a:r>
           </a:p>
           <a:p>
@@ -7471,7 +7471,7 @@
                 <a:latin typeface="Times New Roman" panose="02020603050405020304" pitchFamily="18" charset="0"/>
                 <a:cs typeface="Times New Roman" panose="02020603050405020304" pitchFamily="18" charset="0"/>
               </a:rPr>
-              <a:t>('ME’).</a:t>
+              <a:t>('ME').</a:t>
             </a:r>
             <a:r>
               <a:rPr lang="pt-BR" sz="2000" dirty="0" err="1">
@@ -12039,6 +12039,9 @@
             </a:r>
             <a:r>
               <a:rPr lang="pt-BR" sz="2000" b="1" dirty="0">
+                <a:solidFill>
+                  <a:srgbClr val="FF0000"/>
+                </a:solidFill>
                 <a:latin typeface="Times New Roman" panose="02020603050405020304" pitchFamily="18" charset="0"/>
                 <a:cs typeface="Times New Roman" panose="02020603050405020304" pitchFamily="18" charset="0"/>
               </a:rPr>
@@ -12046,10 +12049,20 @@
             </a:r>
             <a:r>
               <a:rPr lang="pt-BR" sz="2000" dirty="0">
-                <a:latin typeface="Times New Roman" panose="02020603050405020304" pitchFamily="18" charset="0"/>
-                <a:cs typeface="Times New Roman" panose="02020603050405020304" pitchFamily="18" charset="0"/>
-              </a:rPr>
-              <a:t> já possuem o </a:t>
+                <a:solidFill>
+                  <a:srgbClr val="FF0000"/>
+                </a:solidFill>
+                <a:latin typeface="Times New Roman" panose="02020603050405020304" pitchFamily="18" charset="0"/>
+                <a:cs typeface="Times New Roman" panose="02020603050405020304" pitchFamily="18" charset="0"/>
+              </a:rPr>
+              <a:t> </a:t>
+            </a:r>
+            <a:r>
+              <a:rPr lang="pt-BR" sz="2000" dirty="0">
+                <a:latin typeface="Times New Roman" panose="02020603050405020304" pitchFamily="18" charset="0"/>
+                <a:cs typeface="Times New Roman" panose="02020603050405020304" pitchFamily="18" charset="0"/>
+              </a:rPr>
+              <a:t>já possuem o </a:t>
             </a:r>
             <a:r>
               <a:rPr lang="pt-BR" sz="2000" b="1" dirty="0">
@@ -12059,7 +12072,7 @@
                 <a:latin typeface="Times New Roman" panose="02020603050405020304" pitchFamily="18" charset="0"/>
                 <a:cs typeface="Times New Roman" panose="02020603050405020304" pitchFamily="18" charset="0"/>
               </a:rPr>
-              <a:t>Python 3</a:t>
+              <a:t>Python3</a:t>
             </a:r>
             <a:r>
               <a:rPr lang="pt-BR" sz="2000" dirty="0">
@@ -12183,7 +12196,7 @@
                 <a:latin typeface="Times New Roman" panose="02020603050405020304" pitchFamily="18" charset="0"/>
                 <a:cs typeface="Times New Roman" panose="02020603050405020304" pitchFamily="18" charset="0"/>
               </a:rPr>
-              <a:t>Verificar se o Python 3</a:t>
+              <a:t>Verificar a versão do Python 3</a:t>
             </a:r>
             <a:r>
               <a:rPr lang="pt-BR" sz="2000" dirty="0">
@@ -12202,8 +12215,64 @@
                 <a:latin typeface="Times New Roman" panose="02020603050405020304" pitchFamily="18" charset="0"/>
                 <a:cs typeface="Times New Roman" panose="02020603050405020304" pitchFamily="18" charset="0"/>
               </a:rPr>
-              <a:t>	python3 -V</a:t>
-            </a:r>
+              <a:t>	</a:t>
+            </a:r>
+            <a:r>
+              <a:rPr lang="pt-BR" sz="2000" b="1" dirty="0">
+                <a:latin typeface="Times New Roman" panose="02020603050405020304" pitchFamily="18" charset="0"/>
+                <a:cs typeface="Times New Roman" panose="02020603050405020304" pitchFamily="18" charset="0"/>
+              </a:rPr>
+              <a:t>python3</a:t>
+            </a:r>
+            <a:r>
+              <a:rPr lang="pt-BR" sz="2000" dirty="0">
+                <a:latin typeface="Times New Roman" panose="02020603050405020304" pitchFamily="18" charset="0"/>
+                <a:cs typeface="Times New Roman" panose="02020603050405020304" pitchFamily="18" charset="0"/>
+              </a:rPr>
+              <a:t> –V # no Linux; !</a:t>
+            </a:r>
+            <a:r>
+              <a:rPr lang="pt-BR" sz="2000" b="1" dirty="0">
+                <a:solidFill>
+                  <a:srgbClr val="FF0000"/>
+                </a:solidFill>
+                <a:latin typeface="Times New Roman" panose="02020603050405020304" pitchFamily="18" charset="0"/>
+                <a:cs typeface="Times New Roman" panose="02020603050405020304" pitchFamily="18" charset="0"/>
+              </a:rPr>
+              <a:t>python3</a:t>
+            </a:r>
+            <a:r>
+              <a:rPr lang="pt-BR" sz="2000" dirty="0">
+                <a:latin typeface="Times New Roman" panose="02020603050405020304" pitchFamily="18" charset="0"/>
+                <a:cs typeface="Times New Roman" panose="02020603050405020304" pitchFamily="18" charset="0"/>
+              </a:rPr>
+              <a:t> --</a:t>
+            </a:r>
+            <a:r>
+              <a:rPr lang="pt-BR" sz="2000" dirty="0" err="1">
+                <a:latin typeface="Times New Roman" panose="02020603050405020304" pitchFamily="18" charset="0"/>
+                <a:cs typeface="Times New Roman" panose="02020603050405020304" pitchFamily="18" charset="0"/>
+              </a:rPr>
+              <a:t>version</a:t>
+            </a:r>
+            <a:r>
+              <a:rPr lang="pt-BR" sz="2000" dirty="0">
+                <a:latin typeface="Times New Roman" panose="02020603050405020304" pitchFamily="18" charset="0"/>
+                <a:cs typeface="Times New Roman" panose="02020603050405020304" pitchFamily="18" charset="0"/>
+              </a:rPr>
+              <a:t> no </a:t>
+            </a:r>
+            <a:r>
+              <a:rPr lang="pt-BR" sz="2000">
+                <a:latin typeface="Times New Roman" panose="02020603050405020304" pitchFamily="18" charset="0"/>
+                <a:cs typeface="Times New Roman" panose="02020603050405020304" pitchFamily="18" charset="0"/>
+              </a:rPr>
+              <a:t>Google Colab/Windows</a:t>
+            </a:r>
+            <a:endParaRPr lang="pt-BR" sz="2000" dirty="0">
+              <a:latin typeface="Times New Roman" panose="02020603050405020304" pitchFamily="18" charset="0"/>
+              <a:cs typeface="Times New Roman" panose="02020603050405020304" pitchFamily="18" charset="0"/>
+            </a:endParaRPr>
           </a:p>
         </p:txBody>
       </p:sp>
